--- a/Jaarproject opdracht 6.pptx
+++ b/Jaarproject opdracht 6.pptx
@@ -262,6 +262,11 @@
       </a:defRPr>
     </a:lvl9pPr>
   </p:defaultTextStyle>
+  <p:extLst>
+    <p:ext uri="{EFAFB233-063F-42B5-8137-9DF3F51BA10A}">
+      <p15:sldGuideLst xmlns:p15="http://schemas.microsoft.com/office/powerpoint/2012/main"/>
+    </p:ext>
+  </p:extLst>
 </p:presentation>
 </file>
 
@@ -16364,7 +16369,7 @@
             </a:pPr>
             <a:r>
               <a:rPr lang="nl-BE" sz="1400" dirty="0"/>
-              <a:t>Beperkt aanbod, geen 24/7 beschikbaarheid, logistieke problemen,…</a:t>
+              <a:t>Beperkt aanbod, geen 24/7 beschikbaarheid, logistieke problemen</a:t>
             </a:r>
             <a:br>
               <a:rPr lang="nl-BE" sz="1400" dirty="0"/>
@@ -16604,10 +16609,10 @@
       </p:sp>
       <p:pic>
         <p:nvPicPr>
-          <p:cNvPr id="5" name="Afbeelding 4">
+          <p:cNvPr id="3" name="Picture 4">
             <a:extLst>
               <a:ext uri="{FF2B5EF4-FFF2-40B4-BE49-F238E27FC236}">
-                <a16:creationId xmlns:a16="http://schemas.microsoft.com/office/drawing/2014/main" id="{91D37681-EDE0-B066-CB2F-6A092C843CC2}"/>
+                <a16:creationId xmlns:a16="http://schemas.microsoft.com/office/drawing/2014/main" id="{4BF96E80-62C1-2F8E-6E45-9748521DC937}"/>
               </a:ext>
             </a:extLst>
           </p:cNvPr>
@@ -16617,75 +16622,21 @@
           <p:nvPr/>
         </p:nvPicPr>
         <p:blipFill>
-          <a:blip r:embed="rId2"/>
+          <a:blip r:embed="rId2" cstate="print">
+            <a:extLst>
+              <a:ext uri="{28A0092B-C50C-407E-A947-70E740481C1C}">
+                <a14:useLocalDpi xmlns:a14="http://schemas.microsoft.com/office/drawing/2010/main" val="0"/>
+              </a:ext>
+            </a:extLst>
+          </a:blip>
           <a:stretch>
             <a:fillRect/>
           </a:stretch>
         </p:blipFill>
         <p:spPr>
           <a:xfrm>
-            <a:off x="2286000" y="3017948"/>
-            <a:ext cx="4331914" cy="517612"/>
-          </a:xfrm>
-          <a:prstGeom prst="rect">
-            <a:avLst/>
-          </a:prstGeom>
-        </p:spPr>
-      </p:pic>
-      <p:pic>
-        <p:nvPicPr>
-          <p:cNvPr id="7" name="Afbeelding 6" descr="Afbeelding met tekst, Lettertype, nummer, lijn&#10;&#10;Door AI gegenereerde inhoud is mogelijk onjuist.">
-            <a:extLst>
-              <a:ext uri="{FF2B5EF4-FFF2-40B4-BE49-F238E27FC236}">
-                <a16:creationId xmlns:a16="http://schemas.microsoft.com/office/drawing/2014/main" id="{ECEDC77E-78E4-5671-4813-D6170A7B1DA4}"/>
-              </a:ext>
-            </a:extLst>
-          </p:cNvPr>
-          <p:cNvPicPr>
-            <a:picLocks noChangeAspect="1"/>
-          </p:cNvPicPr>
-          <p:nvPr/>
-        </p:nvPicPr>
-        <p:blipFill>
-          <a:blip r:embed="rId3"/>
-          <a:stretch>
-            <a:fillRect/>
-          </a:stretch>
-        </p:blipFill>
-        <p:spPr>
-          <a:xfrm>
-            <a:off x="2286000" y="3589860"/>
-            <a:ext cx="4331914" cy="1089238"/>
-          </a:xfrm>
-          <a:prstGeom prst="rect">
-            <a:avLst/>
-          </a:prstGeom>
-        </p:spPr>
-      </p:pic>
-      <p:pic>
-        <p:nvPicPr>
-          <p:cNvPr id="9" name="Afbeelding 8" descr="Afbeelding met tekst, schermopname, Lettertype, nummer&#10;&#10;Door AI gegenereerde inhoud is mogelijk onjuist.">
-            <a:extLst>
-              <a:ext uri="{FF2B5EF4-FFF2-40B4-BE49-F238E27FC236}">
-                <a16:creationId xmlns:a16="http://schemas.microsoft.com/office/drawing/2014/main" id="{E308D8D1-3ECE-A3DD-E1FE-204ED5D372AE}"/>
-              </a:ext>
-            </a:extLst>
-          </p:cNvPr>
-          <p:cNvPicPr>
-            <a:picLocks noChangeAspect="1"/>
-          </p:cNvPicPr>
-          <p:nvPr/>
-        </p:nvPicPr>
-        <p:blipFill>
-          <a:blip r:embed="rId4"/>
-          <a:stretch>
-            <a:fillRect/>
-          </a:stretch>
-        </p:blipFill>
-        <p:spPr>
-          <a:xfrm>
-            <a:off x="2286000" y="1457158"/>
-            <a:ext cx="4331914" cy="1506490"/>
+            <a:off x="2415083" y="1647670"/>
+            <a:ext cx="4148750" cy="2425543"/>
           </a:xfrm>
           <a:prstGeom prst="rect">
             <a:avLst/>
@@ -16842,6 +16793,26 @@
             <a:r>
               <a:rPr lang="nl-BE" sz="1400" dirty="0"/>
               <a:t>Je kunt films opzoeken</a:t>
+            </a:r>
+          </a:p>
+          <a:p>
+            <a:pPr>
+              <a:buFont typeface="Arial" panose="020B0604020202020204" pitchFamily="34" charset="0"/>
+              <a:buChar char="•"/>
+            </a:pPr>
+            <a:r>
+              <a:rPr lang="nl-BE" sz="1400" dirty="0"/>
+              <a:t>Klanten kunnen inloggen of registreren</a:t>
+            </a:r>
+          </a:p>
+          <a:p>
+            <a:pPr>
+              <a:buFont typeface="Arial" panose="020B0604020202020204" pitchFamily="34" charset="0"/>
+              <a:buChar char="•"/>
+            </a:pPr>
+            <a:r>
+              <a:rPr lang="nl-BE" sz="1400" dirty="0"/>
+              <a:t>Klanten kunnen hun gegevens aanpassen en hun bestellingen zien</a:t>
             </a:r>
           </a:p>
           <a:p>
